--- a/assets/pptx/catalog-267.pptx
+++ b/assets/pptx/catalog-267.pptx
@@ -3411,7 +3411,7 @@
                 <a:ea typeface="Ebrima"/>
                 <a:cs typeface="Ebrima"/>
               </a:rPr>
-              <a:t>ከመመገቤ በፊት እጸልያልሁ (2x)</a:t>
+              <a:t>ከመመገቤ በፊት እጸልያልሁ 2x</a:t>
             </a:r>
           </a:p>
         </p:txBody>
@@ -3532,7 +3532,7 @@
                 <a:ea typeface="Ebrima"/>
                 <a:cs typeface="Ebrima"/>
               </a:rPr>
-              <a:t>ጸሎትህን ሰምቻለሁ (2x)</a:t>
+              <a:t>ጸሎትህን ሰምቻለሁ 2x</a:t>
             </a:r>
           </a:p>
         </p:txBody>
@@ -3671,7 +3671,7 @@
                 <a:ea typeface="Ebrima"/>
                 <a:cs typeface="Ebrima"/>
               </a:rPr>
-              <a:t>አንተ አምላኬ ነህ አምላኬ ነህ (2x)</a:t>
+              <a:t>አንተ አምላኬ ነህ አምላኬ ነህ 2x</a:t>
             </a:r>
           </a:p>
         </p:txBody>
@@ -3810,7 +3810,7 @@
                 <a:ea typeface="Ebrima"/>
                 <a:cs typeface="Ebrima"/>
               </a:rPr>
-              <a:t>አንተ አምላኬ ነህ አምላኬ ነህ (2x)</a:t>
+              <a:t>አንተ አምላኬ ነህ አምላኬ ነህ 2x</a:t>
             </a:r>
           </a:p>
         </p:txBody>
@@ -3980,7 +3980,7 @@
                 <a:ea typeface="Ebrima"/>
                 <a:cs typeface="Ebrima"/>
               </a:rPr>
-              <a:t>ሃሎ? ሄሎ (4x)</a:t>
+              <a:t>ሃሎ? ሄሎ 4x</a:t>
             </a:r>
           </a:p>
         </p:txBody>
@@ -4204,7 +4204,7 @@
                 <a:ea typeface="Ebrima"/>
                 <a:cs typeface="Ebrima"/>
               </a:rPr>
-              <a:t>ለሚለምንም ሁሉም ይሰጣል (2x)</a:t>
+              <a:t>ለሚለምንም ሁሉም ይሰጣል 2x</a:t>
             </a:r>
           </a:p>
         </p:txBody>
@@ -4343,7 +4343,7 @@
                 <a:ea typeface="Ebrima"/>
                 <a:cs typeface="Ebrima"/>
               </a:rPr>
-              <a:t>አንተ አምላኬ ነህ አምላኬ ነህ (2x)</a:t>
+              <a:t>አንተ አምላኬ ነህ አምላኬ ነህ 2x</a:t>
             </a:r>
           </a:p>
         </p:txBody>
@@ -4585,7 +4585,7 @@
                 <a:ea typeface="Ebrima"/>
                 <a:cs typeface="Ebrima"/>
               </a:rPr>
-              <a:t>ከመተኛቴ በፊት እጸልያለሁ (2x)</a:t>
+              <a:t>ከመተኛቴ በፊት እጸልያለሁ 2x</a:t>
             </a:r>
           </a:p>
         </p:txBody>
@@ -4706,7 +4706,7 @@
                 <a:ea typeface="Ebrima"/>
                 <a:cs typeface="Ebrima"/>
               </a:rPr>
-              <a:t>ጸሎትሽን ሰምቻለሁ (2x)</a:t>
+              <a:t>ጸሎትሽን ሰምቻለሁ 2x</a:t>
             </a:r>
           </a:p>
         </p:txBody>
@@ -4845,7 +4845,7 @@
                 <a:ea typeface="Ebrima"/>
                 <a:cs typeface="Ebrima"/>
               </a:rPr>
-              <a:t>አንተ አምላኬ ነህ አምላኬ ነህ (2x)</a:t>
+              <a:t>አንተ አምላኬ ነህ አምላኬ ነህ 2x</a:t>
             </a:r>
           </a:p>
         </p:txBody>
